--- a/dist/초5/사회·역사/권리와생활/초5_사회·역사_권리와생활_03_경제적선택_학생용.pptx
+++ b/dist/초5/사회·역사/권리와생활/초5_사회·역사_권리와생활_03_경제적선택_학생용.pptx
@@ -119,20 +119,20 @@
   <p:extLst>
     <p:ext uri="{521415D9-36F7-43E2-AB2F-B90AF26B5E84}">
       <p14:sectionLst xmlns:p14="http://schemas.microsoft.com/office/powerpoint/2010/main">
-        <p14:section name="도입" id="{47008752-23f8-c610-bcb3-2a599483788d}">
+        <p14:section name="도입" id="{3574fa6f-3d93-9b21-4322-5264f5491670}">
           <p14:sldIdLst>
             <p14:sldId id="256"/>
             <p14:sldId id="257"/>
           </p14:sldIdLst>
         </p14:section>
-        <p14:section name="개념" id="{d8fb576b-fedf-1a7a-637b-b002df0cf074}">
+        <p14:section name="개념" id="{8cf78c2f-e360-f968-96b4-43b0d47b31ab}">
           <p14:sldIdLst>
             <p14:sldId id="258"/>
             <p14:sldId id="259"/>
             <p14:sldId id="262"/>
           </p14:sldIdLst>
         </p14:section>
-        <p14:section name="연습" id="{9f467471-b6ba-297b-cae4-93b5f9ea10d1}">
+        <p14:section name="연습" id="{62bbaff8-20bd-9329-254f-4d7522c7fcff}">
           <p14:sldIdLst>
             <p14:sldId id="260"/>
             <p14:sldId id="261"/>
@@ -140,24 +140,24 @@
             <p14:sldId id="264"/>
           </p14:sldIdLst>
         </p14:section>
-        <p14:section name="개념" id="{b6f9c139-af72-921c-8a79-46936811cbbb}">
+        <p14:section name="개념" id="{bb866a0d-20b6-34d6-5e5a-4713f87dac8b}">
           <p14:sldIdLst/>
         </p14:section>
-        <p14:section name="연습" id="{4c6b0990-2c37-ae54-f077-720763d2b5cb}">
+        <p14:section name="연습" id="{0b218de1-5793-736d-8545-67c528deca65}">
           <p14:sldIdLst/>
         </p14:section>
-        <p14:section name="확인" id="{da2195c7-fcb8-4c34-1279-f04f701eb99e}">
+        <p14:section name="확인" id="{c1523030-7531-2668-46bf-6a1c1eda65fd}">
           <p14:sldIdLst>
             <p14:sldId id="265"/>
             <p14:sldId id="266"/>
           </p14:sldIdLst>
         </p14:section>
-        <p14:section name="정리" id="{7366dd52-98b6-eebe-aec4-0ebc4b159d38}">
+        <p14:section name="정리" id="{864c2378-8668-83f7-e14b-b10dc3fc1cf5}">
           <p14:sldIdLst>
             <p14:sldId id="267"/>
           </p14:sldIdLst>
         </p14:section>
-        <p14:section name="보충" id="{2520a50f-8c35-50f0-13d7-a832e5475283}">
+        <p14:section name="보충" id="{e8e72886-df8e-6b3f-8749-238583b7d81f}">
           <p14:sldIdLst>
             <p14:sldId id="268"/>
           </p14:sldIdLst>
